--- a/Essentials primer - Fede feedback v1.pptx
+++ b/Essentials primer - Fede feedback v1.pptx
@@ -9,9 +9,10 @@
     <p:sldId id="257" r:id="rId3"/>
     <p:sldId id="258" r:id="rId4"/>
     <p:sldId id="259" r:id="rId5"/>
+    <p:sldId id="260" r:id="rId6"/>
   </p:sldIdLst>
   <p:notesMasterIdLst>
-    <p:notesMasterId r:id="rId6"/>
+    <p:notesMasterId r:id="rId7"/>
   </p:notesMasterIdLst>
   <p:sldSz cx="12192000" cy="6858000"/>
   <p:notesSz cx="6858000" cy="12192000"/>
@@ -793,6 +794,94 @@
             <a:fld id="{F7021451-1387-4CA6-816F-3879F97B5CBC}" type="slidenum">
               <a:rPr lang="en-US"/>
               <a:t>4</a:t>
+            </a:fld>
+            <a:endParaRPr lang="en-US"/>
+          </a:p>
+        </p:txBody>
+      </p:sp>
+    </p:spTree>
+    <p:extLst>
+      <p:ext uri="{BB962C8B-B14F-4D97-AF65-F5344CB8AC3E}">
+        <p14:creationId xmlns:p14="http://schemas.microsoft.com/office/powerpoint/2010/main" val="1024086991"/>
+      </p:ext>
+    </p:extLst>
+  </p:cSld>
+  <p:clrMapOvr>
+    <a:masterClrMapping/>
+  </p:clrMapOvr>
+</p:notes>
+</file>
+
+<file path=ppt/notesSlides/notesSlide5.xml><?xml version="1.0" encoding="utf-8"?>
+<p:notes xmlns:a="http://schemas.openxmlformats.org/drawingml/2006/main" xmlns:r="http://schemas.openxmlformats.org/officeDocument/2006/relationships" xmlns:p="http://schemas.openxmlformats.org/presentationml/2006/main">
+  <p:cSld>
+    <p:spTree>
+      <p:nvGrpSpPr>
+        <p:cNvPr id="1" name=""/>
+        <p:cNvGrpSpPr/>
+        <p:nvPr/>
+      </p:nvGrpSpPr>
+      <p:grpSpPr>
+        <a:xfrm>
+          <a:off x="0" y="0"/>
+          <a:ext cx="0" cy="0"/>
+          <a:chOff x="0" y="0"/>
+          <a:chExt cx="0" cy="0"/>
+        </a:xfrm>
+      </p:grpSpPr>
+      <p:sp>
+        <p:nvSpPr>
+          <p:cNvPr id="2" name="Slide Image Placeholder 1"/>
+          <p:cNvSpPr>
+            <a:spLocks noGrp="1" noRot="1" noChangeAspect="1"/>
+          </p:cNvSpPr>
+          <p:nvPr>
+            <p:ph type="sldImg"/>
+          </p:nvPr>
+        </p:nvSpPr>
+        <p:spPr/>
+      </p:sp>
+      <p:sp>
+        <p:nvSpPr>
+          <p:cNvPr id="3" name="Notes Placeholder 2"/>
+          <p:cNvSpPr>
+            <a:spLocks noGrp="1"/>
+          </p:cNvSpPr>
+          <p:nvPr>
+            <p:ph type="body" idx="1"/>
+          </p:nvPr>
+        </p:nvSpPr>
+        <p:spPr/>
+        <p:txBody>
+          <a:bodyPr/>
+          <a:lstStyle/>
+          <a:p>
+            <a:r>
+              <a:rPr lang="en-US" dirty="0"/>
+              <a:t/>
+            </a:r>
+            <a:endParaRPr lang="en-US" dirty="0"/>
+          </a:p>
+        </p:txBody>
+      </p:sp>
+      <p:sp>
+        <p:nvSpPr>
+          <p:cNvPr id="4" name="Slide Number Placeholder 3"/>
+          <p:cNvSpPr>
+            <a:spLocks noGrp="1"/>
+          </p:cNvSpPr>
+          <p:nvPr>
+            <p:ph type="sldNum" sz="quarter" idx="10"/>
+          </p:nvPr>
+        </p:nvSpPr>
+        <p:spPr/>
+        <p:txBody>
+          <a:bodyPr/>
+          <a:lstStyle/>
+          <a:p>
+            <a:fld id="{F7021451-1387-4CA6-816F-3879F97B5CBC}" type="slidenum">
+              <a:rPr lang="en-US"/>
+              <a:t>5</a:t>
             </a:fld>
             <a:endParaRPr lang="en-US"/>
           </a:p>
@@ -6230,6 +6319,997 @@
 </p:sld>
 </file>
 
+<file path=ppt/slides/slide5.xml><?xml version="1.0" encoding="utf-8"?>
+<p:sld xmlns:a="http://schemas.openxmlformats.org/drawingml/2006/main" xmlns:r="http://schemas.openxmlformats.org/officeDocument/2006/relationships" xmlns:p="http://schemas.openxmlformats.org/presentationml/2006/main">
+  <p:cSld name="Slide 5">
+    <p:spTree>
+      <p:nvGrpSpPr>
+        <p:cNvPr id="1" name=""/>
+        <p:cNvGrpSpPr/>
+        <p:nvPr/>
+      </p:nvGrpSpPr>
+      <p:grpSpPr>
+        <a:xfrm>
+          <a:off x="0" y="0"/>
+          <a:ext cx="0" cy="0"/>
+          <a:chOff x="0" y="0"/>
+          <a:chExt cx="0" cy="0"/>
+        </a:xfrm>
+      </p:grpSpPr>
+      <p:sp>
+        <p:nvSpPr>
+          <p:cNvPr id="2" name="Text 0"/>
+          <p:cNvSpPr/>
+          <p:nvPr/>
+        </p:nvSpPr>
+        <p:spPr>
+          <a:xfrm>
+            <a:off x="457200" y="274320"/>
+            <a:ext cx="1280160" cy="384048"/>
+          </a:xfrm>
+          <a:prstGeom prst="rect">
+            <a:avLst/>
+          </a:prstGeom>
+          <a:noFill/>
+          <a:ln/>
+        </p:spPr>
+        <p:txBody>
+          <a:bodyPr wrap="square" lIns="0" tIns="0" rIns="0" bIns="0" rtlCol="0" anchor="ctr"/>
+          <a:lstStyle/>
+          <a:p>
+            <a:pPr indent="0" marL="0">
+              <a:buNone/>
+            </a:pPr>
+            <a:r>
+              <a:rPr lang="en-US" sz="2600" b="1" i="1" dirty="0">
+                <a:solidFill>
+                  <a:srgbClr val="D31242"/>
+                </a:solidFill>
+                <a:latin typeface="Arial" pitchFamily="34" charset="0"/>
+                <a:ea typeface="Arial" pitchFamily="34" charset="-122"/>
+                <a:cs typeface="Arial" pitchFamily="34" charset="-120"/>
+              </a:rPr>
+              <a:t>BJ's</a:t>
+            </a:r>
+            <a:endParaRPr lang="en-US" sz="2600" dirty="0"/>
+          </a:p>
+        </p:txBody>
+      </p:sp>
+      <p:sp>
+        <p:nvSpPr>
+          <p:cNvPr id="3" name="Text 1"/>
+          <p:cNvSpPr/>
+          <p:nvPr/>
+        </p:nvSpPr>
+        <p:spPr>
+          <a:xfrm>
+            <a:off x="475488" y="658368"/>
+            <a:ext cx="2377440" cy="182880"/>
+          </a:xfrm>
+          <a:prstGeom prst="rect">
+            <a:avLst/>
+          </a:prstGeom>
+          <a:noFill/>
+          <a:ln/>
+        </p:spPr>
+        <p:txBody>
+          <a:bodyPr wrap="square" lIns="0" tIns="0" rIns="0" bIns="0" rtlCol="0" anchor="ctr"/>
+          <a:lstStyle/>
+          <a:p>
+            <a:pPr indent="0" marL="0">
+              <a:buNone/>
+            </a:pPr>
+            <a:r>
+              <a:rPr lang="en-US" sz="750" b="1" spc="300" kern="0" dirty="0">
+                <a:solidFill>
+                  <a:srgbClr val="D31242"/>
+                </a:solidFill>
+                <a:latin typeface="Arial" pitchFamily="34" charset="0"/>
+                <a:ea typeface="Arial" pitchFamily="34" charset="-122"/>
+                <a:cs typeface="Arial" pitchFamily="34" charset="-120"/>
+              </a:rPr>
+              <a:t>WHOLESALE CLUB</a:t>
+            </a:r>
+            <a:endParaRPr lang="en-US" sz="750" dirty="0"/>
+          </a:p>
+        </p:txBody>
+      </p:sp>
+      <p:sp>
+        <p:nvSpPr>
+          <p:cNvPr id="4" name="Text 2"/>
+          <p:cNvSpPr/>
+          <p:nvPr/>
+        </p:nvSpPr>
+        <p:spPr>
+          <a:xfrm>
+            <a:off x="7772400" y="384048"/>
+            <a:ext cx="3959352" cy="274320"/>
+          </a:xfrm>
+          <a:prstGeom prst="rect">
+            <a:avLst/>
+          </a:prstGeom>
+          <a:noFill/>
+          <a:ln/>
+        </p:spPr>
+        <p:txBody>
+          <a:bodyPr wrap="square" lIns="0" tIns="0" rIns="0" bIns="0" rtlCol="0" anchor="ctr"/>
+          <a:lstStyle/>
+          <a:p>
+            <a:pPr algn="r" indent="0" marL="0">
+              <a:buNone/>
+            </a:pPr>
+            <a:r>
+              <a:rPr lang="en-US" sz="1150" b="1" spc="200" kern="0" dirty="0">
+                <a:solidFill>
+                  <a:srgbClr val="D31242"/>
+                </a:solidFill>
+                <a:latin typeface="Arial" pitchFamily="34" charset="0"/>
+                <a:ea typeface="Arial" pitchFamily="34" charset="-122"/>
+                <a:cs typeface="Arial" pitchFamily="34" charset="-120"/>
+              </a:rPr>
+              <a:t>OWN THE RESULTS</a:t>
+            </a:r>
+            <a:endParaRPr lang="en-US" sz="1150" dirty="0"/>
+          </a:p>
+        </p:txBody>
+      </p:sp>
+      <p:sp>
+        <p:nvSpPr>
+          <p:cNvPr id="5" name="Text 3"/>
+          <p:cNvSpPr/>
+          <p:nvPr/>
+        </p:nvSpPr>
+        <p:spPr>
+          <a:xfrm>
+            <a:off x="457200" y="1097280"/>
+            <a:ext cx="11274552" cy="548640"/>
+          </a:xfrm>
+          <a:prstGeom prst="rect">
+            <a:avLst/>
+          </a:prstGeom>
+          <a:noFill/>
+          <a:ln/>
+        </p:spPr>
+        <p:txBody>
+          <a:bodyPr wrap="square" lIns="0" tIns="0" rIns="0" bIns="0" rtlCol="0" anchor="t"/>
+          <a:lstStyle/>
+          <a:p>
+            <a:pPr indent="0" marL="0">
+              <a:buNone/>
+            </a:pPr>
+            <a:r>
+              <a:rPr lang="en-US" sz="3000" b="1" dirty="0">
+                <a:solidFill>
+                  <a:srgbClr val="1F2733"/>
+                </a:solidFill>
+                <a:latin typeface="Arial" pitchFamily="34" charset="0"/>
+                <a:ea typeface="Arial" pitchFamily="34" charset="-122"/>
+                <a:cs typeface="Arial" pitchFamily="34" charset="-120"/>
+              </a:rPr>
+              <a:t>You’re at both ends of every AI task</a:t>
+            </a:r>
+            <a:endParaRPr lang="en-US" sz="3000" dirty="0"/>
+          </a:p>
+        </p:txBody>
+      </p:sp>
+      <p:sp>
+        <p:nvSpPr>
+          <p:cNvPr id="6" name="Text 4"/>
+          <p:cNvSpPr/>
+          <p:nvPr/>
+        </p:nvSpPr>
+        <p:spPr>
+          <a:xfrm>
+            <a:off x="457200" y="1737360"/>
+            <a:ext cx="11274552" cy="365760"/>
+          </a:xfrm>
+          <a:prstGeom prst="rect">
+            <a:avLst/>
+          </a:prstGeom>
+          <a:noFill/>
+          <a:ln/>
+        </p:spPr>
+        <p:txBody>
+          <a:bodyPr wrap="square" lIns="0" tIns="0" rIns="0" bIns="0" rtlCol="0" anchor="t"/>
+          <a:lstStyle/>
+          <a:p>
+            <a:pPr indent="0" marL="0">
+              <a:buNone/>
+            </a:pPr>
+            <a:r>
+              <a:rPr lang="en-US" sz="1500" dirty="0">
+                <a:solidFill>
+                  <a:srgbClr val="5E6A78"/>
+                </a:solidFill>
+                <a:latin typeface="Arial" pitchFamily="34" charset="0"/>
+                <a:ea typeface="Arial" pitchFamily="34" charset="-122"/>
+                <a:cs typeface="Arial" pitchFamily="34" charset="-120"/>
+              </a:rPr>
+              <a:t>The machine works the middle. The start and the finish belong to you.</a:t>
+            </a:r>
+            <a:endParaRPr lang="en-US" sz="1500" dirty="0"/>
+          </a:p>
+        </p:txBody>
+      </p:sp>
+      <p:sp>
+        <p:nvSpPr>
+          <p:cNvPr id="7" name="Shape 5"/>
+          <p:cNvSpPr/>
+          <p:nvPr/>
+        </p:nvSpPr>
+        <p:spPr>
+          <a:xfrm>
+            <a:off x="1211580" y="2487168"/>
+            <a:ext cx="1051560" cy="1051560"/>
+          </a:xfrm>
+          <a:prstGeom prst="ellipse">
+            <a:avLst/>
+          </a:prstGeom>
+          <a:solidFill>
+            <a:srgbClr val="D31242"/>
+          </a:solidFill>
+          <a:ln/>
+        </p:spPr>
+      </p:sp>
+      <p:pic>
+        <p:nvPicPr>
+          <p:cNvPr id="8" name="Image 0" descr="icon_user.png">    </p:cNvPr>
+          <p:cNvPicPr>
+            <a:picLocks noChangeAspect="1"/>
+          </p:cNvPicPr>
+          <p:nvPr/>
+        </p:nvPicPr>
+        <p:blipFill>
+          <a:blip r:embed="rId1"/>
+          <a:stretch>
+            <a:fillRect/>
+          </a:stretch>
+        </p:blipFill>
+        <p:spPr>
+          <a:xfrm>
+            <a:off x="1499616" y="2775204"/>
+            <a:ext cx="475488" cy="475488"/>
+          </a:xfrm>
+          <a:prstGeom prst="rect">
+            <a:avLst/>
+          </a:prstGeom>
+        </p:spPr>
+      </p:pic>
+      <p:sp>
+        <p:nvSpPr>
+          <p:cNvPr id="9" name="Text 6"/>
+          <p:cNvSpPr/>
+          <p:nvPr/>
+        </p:nvSpPr>
+        <p:spPr>
+          <a:xfrm>
+            <a:off x="502920" y="3666744"/>
+            <a:ext cx="2468880" cy="256032"/>
+          </a:xfrm>
+          <a:prstGeom prst="rect">
+            <a:avLst/>
+          </a:prstGeom>
+          <a:noFill/>
+          <a:ln/>
+        </p:spPr>
+        <p:txBody>
+          <a:bodyPr wrap="square" lIns="0" tIns="0" rIns="0" bIns="0" rtlCol="0" anchor="ctr"/>
+          <a:lstStyle/>
+          <a:p>
+            <a:pPr algn="ctr" indent="0" marL="0">
+              <a:buNone/>
+            </a:pPr>
+            <a:r>
+              <a:rPr lang="en-US" sz="1400" b="1" spc="100" kern="0" dirty="0">
+                <a:solidFill>
+                  <a:srgbClr val="1F2733"/>
+                </a:solidFill>
+                <a:latin typeface="Arial" pitchFamily="34" charset="0"/>
+                <a:ea typeface="Arial" pitchFamily="34" charset="-122"/>
+                <a:cs typeface="Arial" pitchFamily="34" charset="-120"/>
+              </a:rPr>
+              <a:t>YOU DIRECT</a:t>
+            </a:r>
+            <a:endParaRPr lang="en-US" sz="1400" dirty="0"/>
+          </a:p>
+        </p:txBody>
+      </p:sp>
+      <p:sp>
+        <p:nvSpPr>
+          <p:cNvPr id="10" name="Text 7"/>
+          <p:cNvSpPr/>
+          <p:nvPr/>
+        </p:nvSpPr>
+        <p:spPr>
+          <a:xfrm>
+            <a:off x="502920" y="3941064"/>
+            <a:ext cx="2468880" cy="548640"/>
+          </a:xfrm>
+          <a:prstGeom prst="rect">
+            <a:avLst/>
+          </a:prstGeom>
+          <a:noFill/>
+          <a:ln/>
+        </p:spPr>
+        <p:txBody>
+          <a:bodyPr wrap="square" lIns="0" tIns="0" rIns="0" bIns="0" rtlCol="0" anchor="t"/>
+          <a:lstStyle/>
+          <a:p>
+            <a:pPr algn="ctr" indent="0" marL="0">
+              <a:buNone/>
+            </a:pPr>
+            <a:r>
+              <a:rPr lang="en-US" sz="1050" dirty="0">
+                <a:solidFill>
+                  <a:srgbClr val="5E6A78"/>
+                </a:solidFill>
+                <a:latin typeface="Arial" pitchFamily="34" charset="0"/>
+                <a:ea typeface="Arial" pitchFamily="34" charset="-122"/>
+                <a:cs typeface="Arial" pitchFamily="34" charset="-120"/>
+              </a:rPr>
+              <a:t>The task, the context, what good looks like.</a:t>
+            </a:r>
+            <a:endParaRPr lang="en-US" sz="1050" dirty="0"/>
+          </a:p>
+        </p:txBody>
+      </p:sp>
+      <p:sp>
+        <p:nvSpPr>
+          <p:cNvPr id="11" name="Shape 8"/>
+          <p:cNvSpPr/>
+          <p:nvPr/>
+        </p:nvSpPr>
+        <p:spPr>
+          <a:xfrm>
+            <a:off x="2450592" y="2884932"/>
+            <a:ext cx="1435608" cy="256032"/>
+          </a:xfrm>
+          <a:prstGeom prst="rightArrow">
+            <a:avLst/>
+          </a:prstGeom>
+          <a:solidFill>
+            <a:srgbClr val="D31242"/>
+          </a:solidFill>
+          <a:ln/>
+        </p:spPr>
+      </p:sp>
+      <p:sp>
+        <p:nvSpPr>
+          <p:cNvPr id="12" name="Shape 9"/>
+          <p:cNvSpPr/>
+          <p:nvPr/>
+        </p:nvSpPr>
+        <p:spPr>
+          <a:xfrm>
+            <a:off x="4073652" y="2487168"/>
+            <a:ext cx="1051560" cy="1051560"/>
+          </a:xfrm>
+          <a:prstGeom prst="ellipse">
+            <a:avLst/>
+          </a:prstGeom>
+          <a:solidFill>
+            <a:srgbClr val="D31242"/>
+          </a:solidFill>
+          <a:ln/>
+        </p:spPr>
+      </p:sp>
+      <p:pic>
+        <p:nvPicPr>
+          <p:cNvPr id="13" name="Image 1" descr="icon_robot.png">    </p:cNvPr>
+          <p:cNvPicPr>
+            <a:picLocks noChangeAspect="1"/>
+          </p:cNvPicPr>
+          <p:nvPr/>
+        </p:nvPicPr>
+        <p:blipFill>
+          <a:blip r:embed="rId2"/>
+          <a:stretch>
+            <a:fillRect/>
+          </a:stretch>
+        </p:blipFill>
+        <p:spPr>
+          <a:xfrm>
+            <a:off x="4361688" y="2775204"/>
+            <a:ext cx="475488" cy="475488"/>
+          </a:xfrm>
+          <a:prstGeom prst="rect">
+            <a:avLst/>
+          </a:prstGeom>
+        </p:spPr>
+      </p:pic>
+      <p:sp>
+        <p:nvSpPr>
+          <p:cNvPr id="14" name="Text 10"/>
+          <p:cNvSpPr/>
+          <p:nvPr/>
+        </p:nvSpPr>
+        <p:spPr>
+          <a:xfrm>
+            <a:off x="3364992" y="3666744"/>
+            <a:ext cx="2468880" cy="256032"/>
+          </a:xfrm>
+          <a:prstGeom prst="rect">
+            <a:avLst/>
+          </a:prstGeom>
+          <a:noFill/>
+          <a:ln/>
+        </p:spPr>
+        <p:txBody>
+          <a:bodyPr wrap="square" lIns="0" tIns="0" rIns="0" bIns="0" rtlCol="0" anchor="ctr"/>
+          <a:lstStyle/>
+          <a:p>
+            <a:pPr algn="ctr" indent="0" marL="0">
+              <a:buNone/>
+            </a:pPr>
+            <a:r>
+              <a:rPr lang="en-US" sz="1400" b="1" spc="100" kern="0" dirty="0">
+                <a:solidFill>
+                  <a:srgbClr val="1F2733"/>
+                </a:solidFill>
+                <a:latin typeface="Arial" pitchFamily="34" charset="0"/>
+                <a:ea typeface="Arial" pitchFamily="34" charset="-122"/>
+                <a:cs typeface="Arial" pitchFamily="34" charset="-120"/>
+              </a:rPr>
+              <a:t>AI DRAFTS</a:t>
+            </a:r>
+            <a:endParaRPr lang="en-US" sz="1400" dirty="0"/>
+          </a:p>
+        </p:txBody>
+      </p:sp>
+      <p:sp>
+        <p:nvSpPr>
+          <p:cNvPr id="15" name="Text 11"/>
+          <p:cNvSpPr/>
+          <p:nvPr/>
+        </p:nvSpPr>
+        <p:spPr>
+          <a:xfrm>
+            <a:off x="3364992" y="3941064"/>
+            <a:ext cx="2468880" cy="548640"/>
+          </a:xfrm>
+          <a:prstGeom prst="rect">
+            <a:avLst/>
+          </a:prstGeom>
+          <a:noFill/>
+          <a:ln/>
+        </p:spPr>
+        <p:txBody>
+          <a:bodyPr wrap="square" lIns="0" tIns="0" rIns="0" bIns="0" rtlCol="0" anchor="t"/>
+          <a:lstStyle/>
+          <a:p>
+            <a:pPr algn="ctr" indent="0" marL="0">
+              <a:buNone/>
+            </a:pPr>
+            <a:r>
+              <a:rPr lang="en-US" sz="1050" dirty="0">
+                <a:solidFill>
+                  <a:srgbClr val="5E6A78"/>
+                </a:solidFill>
+                <a:latin typeface="Arial" pitchFamily="34" charset="0"/>
+                <a:ea typeface="Arial" pitchFamily="34" charset="-122"/>
+                <a:cs typeface="Arial" pitchFamily="34" charset="-120"/>
+              </a:rPr>
+              <a:t>A fast first version, and only a first version.</a:t>
+            </a:r>
+            <a:endParaRPr lang="en-US" sz="1050" dirty="0"/>
+          </a:p>
+        </p:txBody>
+      </p:sp>
+      <p:sp>
+        <p:nvSpPr>
+          <p:cNvPr id="16" name="Shape 12"/>
+          <p:cNvSpPr/>
+          <p:nvPr/>
+        </p:nvSpPr>
+        <p:spPr>
+          <a:xfrm>
+            <a:off x="5312664" y="2884932"/>
+            <a:ext cx="1435608" cy="256032"/>
+          </a:xfrm>
+          <a:prstGeom prst="rightArrow">
+            <a:avLst/>
+          </a:prstGeom>
+          <a:solidFill>
+            <a:srgbClr val="D31242"/>
+          </a:solidFill>
+          <a:ln/>
+        </p:spPr>
+      </p:sp>
+      <p:sp>
+        <p:nvSpPr>
+          <p:cNvPr id="17" name="Shape 13"/>
+          <p:cNvSpPr/>
+          <p:nvPr/>
+        </p:nvSpPr>
+        <p:spPr>
+          <a:xfrm>
+            <a:off x="6935724" y="2487168"/>
+            <a:ext cx="1051560" cy="1051560"/>
+          </a:xfrm>
+          <a:prstGeom prst="ellipse">
+            <a:avLst/>
+          </a:prstGeom>
+          <a:solidFill>
+            <a:srgbClr val="D31242"/>
+          </a:solidFill>
+          <a:ln/>
+        </p:spPr>
+      </p:sp>
+      <p:pic>
+        <p:nvPicPr>
+          <p:cNvPr id="18" name="Image 2" descr="icon_usercheck.png">    </p:cNvPr>
+          <p:cNvPicPr>
+            <a:picLocks noChangeAspect="1"/>
+          </p:cNvPicPr>
+          <p:nvPr/>
+        </p:nvPicPr>
+        <p:blipFill>
+          <a:blip r:embed="rId3"/>
+          <a:stretch>
+            <a:fillRect/>
+          </a:stretch>
+        </p:blipFill>
+        <p:spPr>
+          <a:xfrm>
+            <a:off x="7223760" y="2775204"/>
+            <a:ext cx="475488" cy="475488"/>
+          </a:xfrm>
+          <a:prstGeom prst="rect">
+            <a:avLst/>
+          </a:prstGeom>
+        </p:spPr>
+      </p:pic>
+      <p:sp>
+        <p:nvSpPr>
+          <p:cNvPr id="19" name="Text 14"/>
+          <p:cNvSpPr/>
+          <p:nvPr/>
+        </p:nvSpPr>
+        <p:spPr>
+          <a:xfrm>
+            <a:off x="6227064" y="3666744"/>
+            <a:ext cx="2468880" cy="256032"/>
+          </a:xfrm>
+          <a:prstGeom prst="rect">
+            <a:avLst/>
+          </a:prstGeom>
+          <a:noFill/>
+          <a:ln/>
+        </p:spPr>
+        <p:txBody>
+          <a:bodyPr wrap="square" lIns="0" tIns="0" rIns="0" bIns="0" rtlCol="0" anchor="ctr"/>
+          <a:lstStyle/>
+          <a:p>
+            <a:pPr algn="ctr" indent="0" marL="0">
+              <a:buNone/>
+            </a:pPr>
+            <a:r>
+              <a:rPr lang="en-US" sz="1400" b="1" spc="100" kern="0" dirty="0">
+                <a:solidFill>
+                  <a:srgbClr val="1F2733"/>
+                </a:solidFill>
+                <a:latin typeface="Arial" pitchFamily="34" charset="0"/>
+                <a:ea typeface="Arial" pitchFamily="34" charset="-122"/>
+                <a:cs typeface="Arial" pitchFamily="34" charset="-120"/>
+              </a:rPr>
+              <a:t>YOU REVIEW</a:t>
+            </a:r>
+            <a:endParaRPr lang="en-US" sz="1400" dirty="0"/>
+          </a:p>
+        </p:txBody>
+      </p:sp>
+      <p:sp>
+        <p:nvSpPr>
+          <p:cNvPr id="20" name="Text 15"/>
+          <p:cNvSpPr/>
+          <p:nvPr/>
+        </p:nvSpPr>
+        <p:spPr>
+          <a:xfrm>
+            <a:off x="6227064" y="3941064"/>
+            <a:ext cx="2468880" cy="548640"/>
+          </a:xfrm>
+          <a:prstGeom prst="rect">
+            <a:avLst/>
+          </a:prstGeom>
+          <a:noFill/>
+          <a:ln/>
+        </p:spPr>
+        <p:txBody>
+          <a:bodyPr wrap="square" lIns="0" tIns="0" rIns="0" bIns="0" rtlCol="0" anchor="t"/>
+          <a:lstStyle/>
+          <a:p>
+            <a:pPr algn="ctr" indent="0" marL="0">
+              <a:buNone/>
+            </a:pPr>
+            <a:r>
+              <a:rPr lang="en-US" sz="1050" dirty="0">
+                <a:solidFill>
+                  <a:srgbClr val="5E6A78"/>
+                </a:solidFill>
+                <a:latin typeface="Arial" pitchFamily="34" charset="0"/>
+                <a:ea typeface="Arial" pitchFamily="34" charset="-122"/>
+                <a:cs typeface="Arial" pitchFamily="34" charset="-120"/>
+              </a:rPr>
+              <a:t>Facts, fit, gaps, risk.</a:t>
+            </a:r>
+            <a:endParaRPr lang="en-US" sz="1050" dirty="0"/>
+          </a:p>
+        </p:txBody>
+      </p:sp>
+      <p:sp>
+        <p:nvSpPr>
+          <p:cNvPr id="21" name="Shape 16"/>
+          <p:cNvSpPr/>
+          <p:nvPr/>
+        </p:nvSpPr>
+        <p:spPr>
+          <a:xfrm>
+            <a:off x="8174736" y="2884932"/>
+            <a:ext cx="1444752" cy="256032"/>
+          </a:xfrm>
+          <a:prstGeom prst="rightArrow">
+            <a:avLst/>
+          </a:prstGeom>
+          <a:solidFill>
+            <a:srgbClr val="D31242"/>
+          </a:solidFill>
+          <a:ln/>
+        </p:spPr>
+      </p:sp>
+      <p:sp>
+        <p:nvSpPr>
+          <p:cNvPr id="22" name="Shape 17"/>
+          <p:cNvSpPr/>
+          <p:nvPr/>
+        </p:nvSpPr>
+        <p:spPr>
+          <a:xfrm>
+            <a:off x="9806940" y="2487168"/>
+            <a:ext cx="1051560" cy="1051560"/>
+          </a:xfrm>
+          <a:prstGeom prst="ellipse">
+            <a:avLst/>
+          </a:prstGeom>
+          <a:solidFill>
+            <a:srgbClr val="D31242"/>
+          </a:solidFill>
+          <a:ln/>
+        </p:spPr>
+      </p:sp>
+      <p:pic>
+        <p:nvPicPr>
+          <p:cNvPr id="23" name="Image 3" descr="icon_plane.png">    </p:cNvPr>
+          <p:cNvPicPr>
+            <a:picLocks noChangeAspect="1"/>
+          </p:cNvPicPr>
+          <p:nvPr/>
+        </p:nvPicPr>
+        <p:blipFill>
+          <a:blip r:embed="rId4"/>
+          <a:stretch>
+            <a:fillRect/>
+          </a:stretch>
+        </p:blipFill>
+        <p:spPr>
+          <a:xfrm>
+            <a:off x="10094976" y="2775204"/>
+            <a:ext cx="475488" cy="475488"/>
+          </a:xfrm>
+          <a:prstGeom prst="rect">
+            <a:avLst/>
+          </a:prstGeom>
+        </p:spPr>
+      </p:pic>
+      <p:sp>
+        <p:nvSpPr>
+          <p:cNvPr id="24" name="Text 18"/>
+          <p:cNvSpPr/>
+          <p:nvPr/>
+        </p:nvSpPr>
+        <p:spPr>
+          <a:xfrm>
+            <a:off x="9098280" y="3666744"/>
+            <a:ext cx="2468880" cy="256032"/>
+          </a:xfrm>
+          <a:prstGeom prst="rect">
+            <a:avLst/>
+          </a:prstGeom>
+          <a:noFill/>
+          <a:ln/>
+        </p:spPr>
+        <p:txBody>
+          <a:bodyPr wrap="square" lIns="0" tIns="0" rIns="0" bIns="0" rtlCol="0" anchor="ctr"/>
+          <a:lstStyle/>
+          <a:p>
+            <a:pPr algn="ctr" indent="0" marL="0">
+              <a:buNone/>
+            </a:pPr>
+            <a:r>
+              <a:rPr lang="en-US" sz="1400" b="1" spc="100" kern="0" dirty="0">
+                <a:solidFill>
+                  <a:srgbClr val="1F2733"/>
+                </a:solidFill>
+                <a:latin typeface="Arial" pitchFamily="34" charset="0"/>
+                <a:ea typeface="Arial" pitchFamily="34" charset="-122"/>
+                <a:cs typeface="Arial" pitchFamily="34" charset="-120"/>
+              </a:rPr>
+              <a:t>IT GOES OUT</a:t>
+            </a:r>
+            <a:endParaRPr lang="en-US" sz="1400" dirty="0"/>
+          </a:p>
+        </p:txBody>
+      </p:sp>
+      <p:sp>
+        <p:nvSpPr>
+          <p:cNvPr id="25" name="Text 19"/>
+          <p:cNvSpPr/>
+          <p:nvPr/>
+        </p:nvSpPr>
+        <p:spPr>
+          <a:xfrm>
+            <a:off x="9098280" y="3941064"/>
+            <a:ext cx="2468880" cy="548640"/>
+          </a:xfrm>
+          <a:prstGeom prst="rect">
+            <a:avLst/>
+          </a:prstGeom>
+          <a:noFill/>
+          <a:ln/>
+        </p:spPr>
+        <p:txBody>
+          <a:bodyPr wrap="square" lIns="0" tIns="0" rIns="0" bIns="0" rtlCol="0" anchor="t"/>
+          <a:lstStyle/>
+          <a:p>
+            <a:pPr algn="ctr" indent="0" marL="0">
+              <a:buNone/>
+            </a:pPr>
+            <a:r>
+              <a:rPr lang="en-US" sz="1050" dirty="0">
+                <a:solidFill>
+                  <a:srgbClr val="5E6A78"/>
+                </a:solidFill>
+                <a:latin typeface="Arial" pitchFamily="34" charset="0"/>
+                <a:ea typeface="Arial" pitchFamily="34" charset="-122"/>
+                <a:cs typeface="Arial" pitchFamily="34" charset="-120"/>
+              </a:rPr>
+              <a:t>Under your name, on your judgment.</a:t>
+            </a:r>
+            <a:endParaRPr lang="en-US" sz="1050" dirty="0"/>
+          </a:p>
+        </p:txBody>
+      </p:sp>
+      <p:sp>
+        <p:nvSpPr>
+          <p:cNvPr id="26" name="Shape 20"/>
+          <p:cNvSpPr/>
+          <p:nvPr/>
+        </p:nvSpPr>
+        <p:spPr>
+          <a:xfrm>
+            <a:off x="7461504" y="4498848"/>
+            <a:ext cx="0" cy="329184"/>
+          </a:xfrm>
+          <a:prstGeom prst="line">
+            <a:avLst/>
+          </a:prstGeom>
+          <a:noFill/>
+          <a:ln w="25400">
+            <a:solidFill>
+              <a:srgbClr val="D31242"/>
+            </a:solidFill>
+            <a:prstDash val="solid"/>
+          </a:ln>
+        </p:spPr>
+      </p:sp>
+      <p:sp>
+        <p:nvSpPr>
+          <p:cNvPr id="27" name="Shape 21"/>
+          <p:cNvSpPr/>
+          <p:nvPr/>
+        </p:nvSpPr>
+        <p:spPr>
+          <a:xfrm>
+            <a:off x="4599432" y="4828032"/>
+            <a:ext cx="2862072" cy="0"/>
+          </a:xfrm>
+          <a:prstGeom prst="line">
+            <a:avLst/>
+          </a:prstGeom>
+          <a:noFill/>
+          <a:ln w="25400">
+            <a:solidFill>
+              <a:srgbClr val="D31242"/>
+            </a:solidFill>
+            <a:prstDash val="solid"/>
+          </a:ln>
+        </p:spPr>
+      </p:sp>
+      <p:sp>
+        <p:nvSpPr>
+          <p:cNvPr id="28" name="Shape 22"/>
+          <p:cNvSpPr/>
+          <p:nvPr/>
+        </p:nvSpPr>
+        <p:spPr>
+          <a:xfrm>
+            <a:off x="4599432" y="4498848"/>
+            <a:ext cx="0" cy="329184"/>
+          </a:xfrm>
+          <a:prstGeom prst="line">
+            <a:avLst/>
+          </a:prstGeom>
+          <a:noFill/>
+          <a:ln w="25400">
+            <a:solidFill>
+              <a:srgbClr val="D31242"/>
+            </a:solidFill>
+            <a:prstDash val="solid"/>
+            <a:headEnd type="triangle"/>
+          </a:ln>
+        </p:spPr>
+      </p:sp>
+      <p:sp>
+        <p:nvSpPr>
+          <p:cNvPr id="29" name="Text 23"/>
+          <p:cNvSpPr/>
+          <p:nvPr/>
+        </p:nvSpPr>
+        <p:spPr>
+          <a:xfrm>
+            <a:off x="4873752" y="4882896"/>
+            <a:ext cx="2313432" cy="365760"/>
+          </a:xfrm>
+          <a:prstGeom prst="rect">
+            <a:avLst/>
+          </a:prstGeom>
+          <a:noFill/>
+          <a:ln/>
+        </p:spPr>
+        <p:txBody>
+          <a:bodyPr wrap="square" lIns="0" tIns="0" rIns="0" bIns="0" rtlCol="0" anchor="ctr"/>
+          <a:lstStyle/>
+          <a:p>
+            <a:pPr algn="ctr" indent="0" marL="0">
+              <a:buNone/>
+            </a:pPr>
+            <a:r>
+              <a:rPr lang="en-US" sz="1050" i="1" dirty="0">
+                <a:solidFill>
+                  <a:srgbClr val="5E6A78"/>
+                </a:solidFill>
+                <a:latin typeface="Arial" pitchFamily="34" charset="0"/>
+                <a:ea typeface="Arial" pitchFamily="34" charset="-122"/>
+                <a:cs typeface="Arial" pitchFamily="34" charset="-120"/>
+              </a:rPr>
+              <a:t>Not right yet? Send it back with direction.</a:t>
+            </a:r>
+            <a:endParaRPr lang="en-US" sz="1050" dirty="0"/>
+          </a:p>
+        </p:txBody>
+      </p:sp>
+      <p:sp>
+        <p:nvSpPr>
+          <p:cNvPr id="30" name="Shape 24"/>
+          <p:cNvSpPr/>
+          <p:nvPr/>
+        </p:nvSpPr>
+        <p:spPr>
+          <a:xfrm>
+            <a:off x="457200" y="5440680"/>
+            <a:ext cx="11274552" cy="749808"/>
+          </a:xfrm>
+          <a:prstGeom prst="roundRect">
+            <a:avLst>
+              <a:gd name="adj" fmla="val 8537"/>
+            </a:avLst>
+          </a:prstGeom>
+          <a:solidFill>
+            <a:srgbClr val="D31242"/>
+          </a:solidFill>
+          <a:ln/>
+        </p:spPr>
+      </p:sp>
+      <p:sp>
+        <p:nvSpPr>
+          <p:cNvPr id="31" name="Text 25"/>
+          <p:cNvSpPr/>
+          <p:nvPr/>
+        </p:nvSpPr>
+        <p:spPr>
+          <a:xfrm>
+            <a:off x="731520" y="5440680"/>
+            <a:ext cx="10725912" cy="749808"/>
+          </a:xfrm>
+          <a:prstGeom prst="rect">
+            <a:avLst/>
+          </a:prstGeom>
+          <a:noFill/>
+          <a:ln/>
+        </p:spPr>
+        <p:txBody>
+          <a:bodyPr wrap="square" lIns="0" tIns="0" rIns="0" bIns="0" rtlCol="0" anchor="ctr"/>
+          <a:lstStyle/>
+          <a:p>
+            <a:pPr algn="ctr" indent="0" marL="0">
+              <a:buNone/>
+            </a:pPr>
+            <a:r>
+              <a:rPr lang="en-US" sz="1350" dirty="0">
+                <a:solidFill>
+                  <a:srgbClr val="FFFFFF"/>
+                </a:solidFill>
+                <a:latin typeface="Arial" pitchFamily="34" charset="0"/>
+                <a:ea typeface="Arial" pitchFamily="34" charset="-122"/>
+                <a:cs typeface="Arial" pitchFamily="34" charset="-120"/>
+              </a:rPr>
+              <a:t>What AI hands you is a draft. </a:t>
+            </a:r>
+            <a:pPr algn="ctr" indent="0" marL="0">
+              <a:buNone/>
+            </a:pPr>
+            <a:r>
+              <a:rPr lang="en-US" sz="1350" b="1" dirty="0">
+                <a:solidFill>
+                  <a:srgbClr val="FFFFFF"/>
+                </a:solidFill>
+                <a:latin typeface="Arial" pitchFamily="34" charset="0"/>
+                <a:ea typeface="Arial" pitchFamily="34" charset="-122"/>
+                <a:cs typeface="Arial" pitchFamily="34" charset="-120"/>
+              </a:rPr>
+              <a:t>What leaves your hands is your work.</a:t>
+            </a:r>
+            <a:endParaRPr lang="en-US" sz="1350" dirty="0"/>
+          </a:p>
+        </p:txBody>
+      </p:sp>
+      <p:sp>
+        <p:nvSpPr>
+          <p:cNvPr id="32" name="Text 26"/>
+          <p:cNvSpPr/>
+          <p:nvPr/>
+        </p:nvSpPr>
+        <p:spPr>
+          <a:xfrm>
+            <a:off x="457200" y="6510528"/>
+            <a:ext cx="5486400" cy="228600"/>
+          </a:xfrm>
+          <a:prstGeom prst="rect">
+            <a:avLst/>
+          </a:prstGeom>
+          <a:noFill/>
+          <a:ln/>
+        </p:spPr>
+        <p:txBody>
+          <a:bodyPr wrap="square" lIns="0" tIns="0" rIns="0" bIns="0" rtlCol="0" anchor="ctr"/>
+          <a:lstStyle/>
+          <a:p>
+            <a:pPr indent="0" marL="0">
+              <a:buNone/>
+            </a:pPr>
+            <a:r>
+              <a:rPr lang="en-US" sz="800" dirty="0">
+                <a:solidFill>
+                  <a:srgbClr val="8A93A0"/>
+                </a:solidFill>
+                <a:latin typeface="Arial" pitchFamily="34" charset="0"/>
+                <a:ea typeface="Arial" pitchFamily="34" charset="-122"/>
+                <a:cs typeface="Arial" pitchFamily="34" charset="-120"/>
+              </a:rPr>
+              <a:t>Illustrative, not an official BJ's publication.</a:t>
+            </a:r>
+            <a:endParaRPr lang="en-US" sz="800" dirty="0"/>
+          </a:p>
+        </p:txBody>
+      </p:sp>
+    </p:spTree>
+  </p:cSld>
+  <p:clrMapOvr>
+    <a:masterClrMapping/>
+  </p:clrMapOvr>
+</p:sld>
+</file>
+
 <file path=ppt/theme/theme1.xml><?xml version="1.0" encoding="utf-8"?>
 <a:theme xmlns:a="http://schemas.openxmlformats.org/drawingml/2006/main" name="Office Theme">
   <a:themeElements>
